--- a/course/slides/AF-TRACKF-M04/AF-TRACKF-M04-v1.pptx
+++ b/course/slides/AF-TRACKF-M04/AF-TRACKF-M04-v1.pptx
@@ -11677,7 +11677,7 @@
                 </a:solidFill>
                 <a:latin typeface="Lexend"/>
               </a:rPr>
-              <a:t>Lock is always decided by a person.</a:t>
+              <a:t>There is a reason it is always a person.</a:t>
             </a:r>
           </a:p>
         </p:txBody>
@@ -15087,7 +15087,7 @@
                 </a:solidFill>
                 <a:latin typeface="Lexend"/>
               </a:rPr>
-              <a:t>The first note is a who-sees-and-does-what map.</a:t>
+              <a:t>It has one line for each role and each action.</a:t>
             </a:r>
           </a:p>
         </p:txBody>
@@ -15452,7 +15452,7 @@
         </p:blipFill>
         <p:spPr>
           <a:xfrm>
-            <a:off x="609600" y="3185160"/>
+            <a:off x="609600" y="3020060"/>
             <a:ext cx="1016000" cy="1016000"/>
           </a:xfrm>
           <a:prstGeom prst="rect">
@@ -15468,7 +15468,7 @@
         </p:nvSpPr>
         <p:spPr>
           <a:xfrm>
-            <a:off x="2070100" y="3147060"/>
+            <a:off x="2070100" y="2981960"/>
             <a:ext cx="9563100" cy="619760"/>
           </a:xfrm>
           <a:prstGeom prst="rect">
@@ -15507,8 +15507,8 @@
         </p:nvSpPr>
         <p:spPr>
           <a:xfrm>
-            <a:off x="2070100" y="3931920"/>
-            <a:ext cx="9563100" cy="355600"/>
+            <a:off x="2070100" y="3766820"/>
+            <a:ext cx="9563100" cy="685800"/>
           </a:xfrm>
           <a:prstGeom prst="rect">
             <a:avLst/>
@@ -15533,7 +15533,23 @@
                 </a:solidFill>
                 <a:latin typeface="Lexend"/>
               </a:rPr>
-              <a:t>The second note is content as data.</a:t>
+              <a:t>Every word, label, colour and category the app shows is listed and stored as</a:t>
+            </a:r>
+          </a:p>
+          <a:p>
+            <a:pPr algn="l">
+              <a:lnSpc>
+                <a:spcPts val="2600"/>
+              </a:lnSpc>
+            </a:pPr>
+            <a:r>
+              <a:rPr sz="2000" b="0">
+                <a:solidFill>
+                  <a:srgbClr val="756E65"/>
+                </a:solidFill>
+                <a:latin typeface="Lexend"/>
+              </a:rPr>
+              <a:t>rows in a table, never typed into the code.</a:t>
             </a:r>
           </a:p>
         </p:txBody>
@@ -16344,7 +16360,7 @@
         </p:blipFill>
         <p:spPr>
           <a:xfrm>
-            <a:off x="609600" y="3185160"/>
+            <a:off x="609600" y="3020060"/>
             <a:ext cx="1016000" cy="1016000"/>
           </a:xfrm>
           <a:prstGeom prst="rect">
@@ -16360,7 +16376,7 @@
         </p:nvSpPr>
         <p:spPr>
           <a:xfrm>
-            <a:off x="2070100" y="3147060"/>
+            <a:off x="2070100" y="2981960"/>
             <a:ext cx="9563100" cy="619760"/>
           </a:xfrm>
           <a:prstGeom prst="rect">
@@ -16399,8 +16415,8 @@
         </p:nvSpPr>
         <p:spPr>
           <a:xfrm>
-            <a:off x="2070100" y="3931920"/>
-            <a:ext cx="9563100" cy="355600"/>
+            <a:off x="2070100" y="3766820"/>
+            <a:ext cx="9563100" cy="685800"/>
           </a:xfrm>
           <a:prstGeom prst="rect">
             <a:avLst/>
@@ -16425,7 +16441,23 @@
                 </a:solidFill>
                 <a:latin typeface="Lexend"/>
               </a:rPr>
-              <a:t>The fifth note is the launch-minimum scope.</a:t>
+              <a:t>It is the fewest tables and screens that let a first customer pay and use the</a:t>
+            </a:r>
+          </a:p>
+          <a:p>
+            <a:pPr algn="l">
+              <a:lnSpc>
+                <a:spcPts val="2600"/>
+              </a:lnSpc>
+            </a:pPr>
+            <a:r>
+              <a:rPr sz="2000" b="0">
+                <a:solidFill>
+                  <a:srgbClr val="756E65"/>
+                </a:solidFill>
+                <a:latin typeface="Lexend"/>
+              </a:rPr>
+              <a:t>app.</a:t>
             </a:r>
           </a:p>
         </p:txBody>
